--- a/doc/Q3求解讨论.pptx
+++ b/doc/Q3求解讨论.pptx
@@ -8013,10 +8013,7 @@
             <a:avLst/>
           </a:prstGeom>
           <a:solidFill>
-            <a:schemeClr val="accent2">
-              <a:lumMod val="40000"/>
-              <a:lumOff val="60000"/>
-            </a:schemeClr>
+            <a:srgbClr val="FF9999"/>
           </a:solidFill>
           <a:ln>
             <a:solidFill>
@@ -8063,10 +8060,7 @@
             <a:avLst/>
           </a:prstGeom>
           <a:solidFill>
-            <a:schemeClr val="accent5">
-              <a:lumMod val="40000"/>
-              <a:lumOff val="60000"/>
-            </a:schemeClr>
+            <a:srgbClr val="9999FF"/>
           </a:solidFill>
           <a:ln>
             <a:solidFill>
@@ -8170,30 +8164,293 @@
       </p:sp>
       <p:sp>
         <p:nvSpPr>
-          <p:cNvPr id="52" name="矩形 51"/>
-          <p:cNvSpPr/>
+          <p:cNvPr id="57" name="文本框 56"/>
+          <p:cNvSpPr txBox="1"/>
           <p:nvPr/>
         </p:nvSpPr>
         <p:spPr>
           <a:xfrm>
-            <a:off x="10183495" y="1115695"/>
-            <a:ext cx="426720" cy="201295"/>
+            <a:off x="938530" y="418465"/>
+            <a:ext cx="1932940" cy="368300"/>
           </a:xfrm>
           <a:prstGeom prst="rect">
             <a:avLst/>
           </a:prstGeom>
-          <a:solidFill>
-            <a:schemeClr val="accent6">
-              <a:lumMod val="40000"/>
-              <a:lumOff val="60000"/>
-              <a:alpha val="70000"/>
-            </a:schemeClr>
-          </a:solidFill>
-          <a:ln>
+          <a:noFill/>
+        </p:spPr>
+        <p:txBody>
+          <a:bodyPr wrap="square" rtlCol="0">
+            <a:spAutoFit/>
+          </a:bodyPr>
+          <a:p>
+            <a:r>
+              <a:rPr lang="zh-CN" altLang="en-US"/>
+              <a:t>切割</a:t>
+            </a:r>
+            <a:r>
+              <a:rPr lang="zh-CN" altLang="en-US"/>
+              <a:t>方法</a:t>
+            </a:r>
+            <a:endParaRPr lang="zh-CN" altLang="en-US"/>
+          </a:p>
+        </p:txBody>
+      </p:sp>
+      <p:sp>
+        <p:nvSpPr>
+          <p:cNvPr id="3" name="文本框 2"/>
+          <p:cNvSpPr txBox="1"/>
+          <p:nvPr/>
+        </p:nvSpPr>
+        <p:spPr>
+          <a:xfrm>
+            <a:off x="5995035" y="1323340"/>
+            <a:ext cx="4615180" cy="2030095"/>
+          </a:xfrm>
+          <a:prstGeom prst="rect">
+            <a:avLst/>
+          </a:prstGeom>
+          <a:noFill/>
+        </p:spPr>
+        <p:txBody>
+          <a:bodyPr wrap="square" rtlCol="0">
+            <a:spAutoFit/>
+          </a:bodyPr>
+          <a:p>
+            <a:r>
+              <a:rPr lang="zh-CN" altLang="en-US"/>
+              <a:t>（</a:t>
+            </a:r>
+            <a:r>
+              <a:rPr lang="en-US" altLang="zh-CN"/>
+              <a:t>1</a:t>
+            </a:r>
+            <a:r>
+              <a:rPr lang="zh-CN" altLang="en-US"/>
+              <a:t>）首先对于</a:t>
+            </a:r>
+            <a:r>
+              <a:rPr lang="en-US" altLang="zh-CN"/>
+              <a:t>PO</a:t>
+            </a:r>
+            <a:r>
+              <a:rPr lang="zh-CN" altLang="en-US"/>
+              <a:t>层，找出内部重叠的，</a:t>
+            </a:r>
+            <a:r>
+              <a:rPr lang="zh-CN" altLang="en-US" b="1">
+                <a:solidFill>
+                  <a:srgbClr val="FF0000"/>
+                </a:solidFill>
+              </a:rPr>
+              <a:t>求并集</a:t>
+            </a:r>
+            <a:r>
+              <a:rPr lang="zh-CN" altLang="en-US"/>
+              <a:t>进行合并，注意可能有多个一起</a:t>
+            </a:r>
+            <a:r>
+              <a:rPr lang="zh-CN" altLang="en-US"/>
+              <a:t>重叠。</a:t>
+            </a:r>
+            <a:endParaRPr lang="zh-CN" altLang="en-US"/>
+          </a:p>
+          <a:p>
+            <a:r>
+              <a:rPr lang="zh-CN" altLang="en-US"/>
+              <a:t>（</a:t>
+            </a:r>
+            <a:r>
+              <a:rPr lang="en-US" altLang="zh-CN"/>
+              <a:t>2</a:t>
+            </a:r>
+            <a:r>
+              <a:rPr lang="zh-CN" altLang="en-US"/>
+              <a:t>）对于</a:t>
+            </a:r>
+            <a:r>
+              <a:rPr lang="en-US" altLang="zh-CN"/>
+              <a:t>AA</a:t>
+            </a:r>
+            <a:r>
+              <a:rPr lang="zh-CN" altLang="en-US"/>
+              <a:t>层如何切割？</a:t>
+            </a:r>
+            <a:r>
+              <a:rPr lang="zh-CN" altLang="en-US" b="1">
+                <a:solidFill>
+                  <a:srgbClr val="FF0000"/>
+                </a:solidFill>
+              </a:rPr>
+              <a:t>求差集</a:t>
+            </a:r>
+            <a:r>
+              <a:rPr lang="zh-CN" altLang="en-US"/>
+              <a:t>（</a:t>
+            </a:r>
+            <a:r>
+              <a:rPr lang="zh-CN" altLang="en-US">
+                <a:sym typeface="+mn-ea"/>
+              </a:rPr>
+              <a:t>对每个</a:t>
+            </a:r>
+            <a:r>
+              <a:rPr lang="en-US" altLang="zh-CN">
+                <a:sym typeface="+mn-ea"/>
+              </a:rPr>
+              <a:t>AA</a:t>
+            </a:r>
+            <a:r>
+              <a:rPr lang="zh-CN" altLang="en-US">
+                <a:sym typeface="+mn-ea"/>
+              </a:rPr>
+              <a:t>多边形，差去切割它的各个</a:t>
+            </a:r>
+            <a:r>
+              <a:rPr lang="en-US" altLang="zh-CN">
+                <a:sym typeface="+mn-ea"/>
+              </a:rPr>
+              <a:t>PO</a:t>
+            </a:r>
+            <a:r>
+              <a:rPr lang="zh-CN" altLang="en-US"/>
+              <a:t>）。注意一个</a:t>
+            </a:r>
+            <a:r>
+              <a:rPr lang="en-US" altLang="zh-CN"/>
+              <a:t>AA</a:t>
+            </a:r>
+            <a:r>
+              <a:rPr lang="zh-CN" altLang="en-US"/>
+              <a:t>可能被多个</a:t>
+            </a:r>
+            <a:r>
+              <a:rPr lang="en-US" altLang="zh-CN"/>
+              <a:t>PO</a:t>
+            </a:r>
+            <a:r>
+              <a:rPr lang="zh-CN" altLang="en-US"/>
+              <a:t>一起切割。</a:t>
+            </a:r>
+            <a:endParaRPr lang="zh-CN" altLang="en-US"/>
+          </a:p>
+          <a:p>
+            <a:r>
+              <a:rPr lang="zh-CN" altLang="en-US"/>
+              <a:t>（</a:t>
+            </a:r>
+            <a:r>
+              <a:rPr lang="en-US" altLang="zh-CN"/>
+              <a:t>3</a:t>
+            </a:r>
+            <a:r>
+              <a:rPr lang="zh-CN" altLang="en-US"/>
+              <a:t>）对曼哈顿多边形，是否有更好</a:t>
+            </a:r>
+            <a:r>
+              <a:rPr lang="zh-CN" altLang="en-US"/>
+              <a:t>办法？</a:t>
+            </a:r>
+            <a:endParaRPr lang="zh-CN" altLang="en-US"/>
+          </a:p>
+          <a:p>
+            <a:r>
+              <a:rPr lang="zh-CN" altLang="en-US"/>
+              <a:t>设计</a:t>
+            </a:r>
+            <a:r>
+              <a:rPr lang="zh-CN" altLang="en-US" b="1">
+                <a:solidFill>
+                  <a:srgbClr val="FF0000"/>
+                </a:solidFill>
+              </a:rPr>
+              <a:t>针对曼哈顿多边形优化的布尔运算</a:t>
+            </a:r>
+            <a:r>
+              <a:rPr lang="zh-CN" altLang="en-US"/>
+              <a:t>求解。</a:t>
+            </a:r>
+            <a:endParaRPr lang="zh-CN" altLang="en-US"/>
+          </a:p>
+        </p:txBody>
+      </p:sp>
+      <p:pic>
+        <p:nvPicPr>
+          <p:cNvPr id="2" name="图片 1"/>
+          <p:cNvPicPr>
+            <a:picLocks noChangeAspect="1"/>
+          </p:cNvPicPr>
+          <p:nvPr/>
+        </p:nvPicPr>
+        <p:blipFill>
+          <a:blip r:embed="rId1"/>
+          <a:stretch>
+            <a:fillRect/>
+          </a:stretch>
+        </p:blipFill>
+        <p:spPr>
+          <a:xfrm>
+            <a:off x="170815" y="1073150"/>
+            <a:ext cx="5605780" cy="2477770"/>
+          </a:xfrm>
+          <a:prstGeom prst="rect">
+            <a:avLst/>
+          </a:prstGeom>
+        </p:spPr>
+      </p:pic>
+      <p:pic>
+        <p:nvPicPr>
+          <p:cNvPr id="6" name="图片 5"/>
+          <p:cNvPicPr>
+            <a:picLocks noChangeAspect="1"/>
+          </p:cNvPicPr>
+          <p:nvPr/>
+        </p:nvPicPr>
+        <p:blipFill>
+          <a:blip r:embed="rId2"/>
+          <a:srcRect l="28239" b="55834"/>
+          <a:stretch>
+            <a:fillRect/>
+          </a:stretch>
+        </p:blipFill>
+        <p:spPr>
+          <a:xfrm>
+            <a:off x="1659890" y="3731260"/>
+            <a:ext cx="4055110" cy="1083945"/>
+          </a:xfrm>
+          <a:prstGeom prst="rect">
+            <a:avLst/>
+          </a:prstGeom>
+        </p:spPr>
+      </p:pic>
+      <p:sp>
+        <p:nvSpPr>
+          <p:cNvPr id="9" name="矩形 8"/>
+          <p:cNvSpPr/>
+          <p:nvPr/>
+        </p:nvSpPr>
+        <p:spPr>
+          <a:xfrm>
+            <a:off x="1816100" y="1017270"/>
+            <a:ext cx="3989070" cy="1039495"/>
+          </a:xfrm>
+          <a:prstGeom prst="rect">
+            <a:avLst/>
+          </a:prstGeom>
+          <a:noFill/>
+          <a:ln w="19050">
             <a:solidFill>
-              <a:schemeClr val="tx1"/>
+              <a:schemeClr val="accent6"/>
             </a:solidFill>
           </a:ln>
+          <a:extLst>
+            <a:ext uri="{909E8E84-426E-40DD-AFC4-6F175D3DCCD1}">
+              <a14:hiddenFill xmlns:a14="http://schemas.microsoft.com/office/drawing/2010/main">
+                <a:solidFill>
+                  <a:schemeClr val="accent1"/>
+                </a:solidFill>
+              </a14:hiddenFill>
+            </a:ext>
+          </a:extLst>
         </p:spPr>
         <p:style>
           <a:lnRef idx="2">
@@ -8221,14 +8478,14 @@
       </p:sp>
       <p:sp>
         <p:nvSpPr>
-          <p:cNvPr id="54" name="文本框 53"/>
+          <p:cNvPr id="10" name="文本框 9"/>
           <p:cNvSpPr txBox="1"/>
           <p:nvPr/>
         </p:nvSpPr>
         <p:spPr>
           <a:xfrm>
-            <a:off x="10656570" y="1066165"/>
-            <a:ext cx="862330" cy="337185"/>
+            <a:off x="6120130" y="3768090"/>
+            <a:ext cx="4064000" cy="922020"/>
           </a:xfrm>
           <a:prstGeom prst="rect">
             <a:avLst/>
@@ -8241,29 +8498,35 @@
           </a:bodyPr>
           <a:p>
             <a:r>
-              <a:rPr lang="en-US" altLang="zh-CN" sz="1600">
-                <a:latin typeface="微软雅黑" panose="020B0503020204020204" charset="-122"/>
-                <a:ea typeface="微软雅黑" panose="020B0503020204020204" charset="-122"/>
-              </a:rPr>
-              <a:t>CT</a:t>
-            </a:r>
-            <a:endParaRPr lang="en-US" altLang="zh-CN" sz="1600">
-              <a:latin typeface="微软雅黑" panose="020B0503020204020204" charset="-122"/>
-              <a:ea typeface="微软雅黑" panose="020B0503020204020204" charset="-122"/>
-            </a:endParaRPr>
-          </a:p>
-        </p:txBody>
-      </p:sp>
-      <p:sp>
-        <p:nvSpPr>
-          <p:cNvPr id="57" name="文本框 56"/>
+              <a:rPr lang="zh-CN" altLang="en-US"/>
+              <a:t>求完差集后，如何确定切割后</a:t>
+            </a:r>
+            <a:r>
+              <a:rPr lang="en-US" altLang="zh-CN"/>
+              <a:t>AA</a:t>
+            </a:r>
+            <a:r>
+              <a:rPr lang="zh-CN" altLang="en-US"/>
+              <a:t>多边形的各小块之间是否存在连接性关系，以及连接他们的是哪个</a:t>
+            </a:r>
+            <a:r>
+              <a:rPr lang="en-US" altLang="zh-CN"/>
+              <a:t>PO?</a:t>
+            </a:r>
+            <a:endParaRPr lang="en-US" altLang="zh-CN"/>
+          </a:p>
+        </p:txBody>
+      </p:sp>
+      <p:sp>
+        <p:nvSpPr>
+          <p:cNvPr id="11" name="文本框 10"/>
           <p:cNvSpPr txBox="1"/>
           <p:nvPr/>
         </p:nvSpPr>
         <p:spPr>
           <a:xfrm>
-            <a:off x="938530" y="799465"/>
-            <a:ext cx="1932940" cy="368300"/>
+            <a:off x="1311910" y="5091430"/>
+            <a:ext cx="9048115" cy="645160"/>
           </a:xfrm>
           <a:prstGeom prst="rect">
             <a:avLst/>
@@ -8277,11 +8540,63 @@
           <a:p>
             <a:r>
               <a:rPr lang="zh-CN" altLang="en-US"/>
-              <a:t>切割</a:t>
+              <a:t>朴素方法：遍历切割后</a:t>
+            </a:r>
+            <a:r>
+              <a:rPr lang="en-US" altLang="zh-CN"/>
+              <a:t>AA</a:t>
             </a:r>
             <a:r>
               <a:rPr lang="zh-CN" altLang="en-US"/>
-              <a:t>方法</a:t>
+              <a:t>的小块，将每个小块与切割该</a:t>
+            </a:r>
+            <a:r>
+              <a:rPr lang="en-US" altLang="zh-CN"/>
+              <a:t>AA</a:t>
+            </a:r>
+            <a:r>
+              <a:rPr lang="zh-CN" altLang="en-US"/>
+              <a:t>的每个</a:t>
+            </a:r>
+            <a:r>
+              <a:rPr lang="en-US" altLang="zh-CN"/>
+              <a:t>PO</a:t>
+            </a:r>
+            <a:r>
+              <a:rPr lang="zh-CN" altLang="en-US">
+                <a:solidFill>
+                  <a:srgbClr val="FF0000"/>
+                </a:solidFill>
+              </a:rPr>
+              <a:t>检测相交</a:t>
+            </a:r>
+            <a:r>
+              <a:rPr lang="zh-CN" altLang="en-US"/>
+              <a:t>，记录每个</a:t>
+            </a:r>
+            <a:r>
+              <a:rPr lang="en-US" altLang="zh-CN"/>
+              <a:t>PO</a:t>
+            </a:r>
+            <a:r>
+              <a:rPr lang="zh-CN" altLang="en-US"/>
+              <a:t>连接的小块，链式连接每个</a:t>
+            </a:r>
+            <a:r>
+              <a:rPr lang="en-US" altLang="zh-CN"/>
+              <a:t>PO</a:t>
+            </a:r>
+            <a:r>
+              <a:rPr lang="zh-CN" altLang="en-US"/>
+              <a:t>连接的小块即可得到该</a:t>
+            </a:r>
+            <a:r>
+              <a:rPr lang="en-US" altLang="zh-CN"/>
+              <a:t>PO</a:t>
+            </a:r>
+            <a:r>
+              <a:rPr lang="zh-CN" altLang="en-US"/>
+              <a:t>的切割边集合</a:t>
             </a:r>
             <a:endParaRPr lang="zh-CN" altLang="en-US"/>
           </a:p>
@@ -8289,14 +8604,14 @@
       </p:sp>
       <p:sp>
         <p:nvSpPr>
-          <p:cNvPr id="3" name="文本框 2"/>
+          <p:cNvPr id="12" name="文本框 11"/>
           <p:cNvSpPr txBox="1"/>
           <p:nvPr/>
         </p:nvSpPr>
         <p:spPr>
           <a:xfrm>
-            <a:off x="5467350" y="3216275"/>
-            <a:ext cx="4615180" cy="1198880"/>
+            <a:off x="1311910" y="5982970"/>
+            <a:ext cx="8872220" cy="645160"/>
           </a:xfrm>
           <a:prstGeom prst="rect">
             <a:avLst/>
@@ -8310,15 +8625,7 @@
           <a:p>
             <a:r>
               <a:rPr lang="zh-CN" altLang="en-US"/>
-              <a:t>（</a:t>
-            </a:r>
-            <a:r>
-              <a:rPr lang="en-US" altLang="zh-CN"/>
-              <a:t>1</a:t>
-            </a:r>
-            <a:r>
-              <a:rPr lang="zh-CN" altLang="en-US"/>
-              <a:t>）对于</a:t>
+              <a:t>加速方法：求差集的过程中就记录每个</a:t>
             </a:r>
             <a:r>
               <a:rPr lang="en-US" altLang="zh-CN"/>
@@ -8326,493 +8633,313 @@
             </a:r>
             <a:r>
               <a:rPr lang="zh-CN" altLang="en-US"/>
-              <a:t>层，找出内部重叠的，进行合并，可能有多个一起</a:t>
-            </a:r>
-            <a:r>
-              <a:rPr lang="zh-CN" altLang="en-US"/>
-              <a:t>重叠？</a:t>
+              <a:t>切割后连接的小块，然后</a:t>
+            </a:r>
+            <a:r>
+              <a:rPr lang="zh-CN" altLang="en-US">
+                <a:sym typeface="+mn-ea"/>
+              </a:rPr>
+              <a:t>链式连接每个</a:t>
+            </a:r>
+            <a:r>
+              <a:rPr lang="en-US" altLang="zh-CN">
+                <a:sym typeface="+mn-ea"/>
+              </a:rPr>
+              <a:t>PO</a:t>
+            </a:r>
+            <a:r>
+              <a:rPr lang="zh-CN" altLang="en-US">
+                <a:sym typeface="+mn-ea"/>
+              </a:rPr>
+              <a:t>连接的小块即可，不用再检测相交</a:t>
             </a:r>
             <a:endParaRPr lang="zh-CN" altLang="en-US"/>
           </a:p>
-          <a:p>
-            <a:r>
-              <a:rPr lang="zh-CN" altLang="en-US"/>
-              <a:t>（</a:t>
-            </a:r>
-            <a:r>
-              <a:rPr lang="en-US" altLang="zh-CN"/>
-              <a:t>2</a:t>
-            </a:r>
-            <a:r>
-              <a:rPr lang="zh-CN" altLang="en-US"/>
-              <a:t>）对于</a:t>
-            </a:r>
-            <a:r>
-              <a:rPr lang="en-US" altLang="zh-CN"/>
-              <a:t>AA</a:t>
-            </a:r>
-            <a:r>
-              <a:rPr lang="zh-CN" altLang="en-US"/>
-              <a:t>层如何切割？求差</a:t>
-            </a:r>
-            <a:r>
-              <a:rPr lang="zh-CN" altLang="en-US"/>
-              <a:t>集？</a:t>
-            </a:r>
-            <a:endParaRPr lang="zh-CN" altLang="en-US"/>
-          </a:p>
-          <a:p>
-            <a:r>
-              <a:rPr lang="zh-CN" altLang="en-US"/>
-              <a:t>（</a:t>
-            </a:r>
-            <a:r>
-              <a:rPr lang="en-US" altLang="zh-CN"/>
-              <a:t>3</a:t>
-            </a:r>
-            <a:r>
-              <a:rPr lang="zh-CN" altLang="en-US"/>
-              <a:t>）对曼哈顿多边形，是否有更好</a:t>
-            </a:r>
-            <a:r>
-              <a:rPr lang="zh-CN" altLang="en-US"/>
-              <a:t>办法？</a:t>
-            </a:r>
-            <a:endParaRPr lang="zh-CN" altLang="en-US"/>
-          </a:p>
-        </p:txBody>
-      </p:sp>
-      <p:grpSp>
-        <p:nvGrpSpPr>
-          <p:cNvPr id="28" name="组合 27"/>
-          <p:cNvGrpSpPr/>
+        </p:txBody>
+      </p:sp>
+      <p:cxnSp>
+        <p:nvCxnSpPr>
+          <p:cNvPr id="13" name="直接连接符 12"/>
+          <p:cNvCxnSpPr/>
           <p:nvPr/>
-        </p:nvGrpSpPr>
-        <p:grpSpPr>
-          <a:xfrm>
-            <a:off x="1470660" y="2056765"/>
-            <a:ext cx="3258820" cy="3255010"/>
-            <a:chOff x="1914" y="2626"/>
-            <a:chExt cx="5815" cy="5786"/>
-          </a:xfrm>
-        </p:grpSpPr>
-        <p:sp>
-          <p:nvSpPr>
-            <p:cNvPr id="37" name="任意多边形 36"/>
-            <p:cNvSpPr/>
-            <p:nvPr/>
-          </p:nvSpPr>
-          <p:spPr>
-            <a:xfrm>
-              <a:off x="1914" y="3111"/>
-              <a:ext cx="5513" cy="4818"/>
-            </a:xfrm>
-            <a:custGeom>
-              <a:avLst/>
-              <a:gdLst/>
-              <a:ahLst/>
-              <a:cxnLst>
-                <a:cxn ang="3">
-                  <a:pos x="hc" y="t"/>
-                </a:cxn>
-                <a:cxn ang="cd2">
-                  <a:pos x="l" y="vc"/>
-                </a:cxn>
-                <a:cxn ang="cd4">
-                  <a:pos x="hc" y="b"/>
-                </a:cxn>
-                <a:cxn ang="0">
-                  <a:pos x="r" y="vc"/>
-                </a:cxn>
-              </a:cxnLst>
-              <a:rect l="l" t="t" r="r" b="b"/>
-              <a:pathLst>
-                <a:path w="1873" h="2220">
-                  <a:moveTo>
-                    <a:pt x="1604" y="1699"/>
-                  </a:moveTo>
-                  <a:lnTo>
-                    <a:pt x="1873" y="1699"/>
-                  </a:lnTo>
-                  <a:lnTo>
-                    <a:pt x="1873" y="2220"/>
-                  </a:lnTo>
-                  <a:lnTo>
-                    <a:pt x="1604" y="2220"/>
-                  </a:lnTo>
-                  <a:lnTo>
-                    <a:pt x="1604" y="1699"/>
-                  </a:lnTo>
-                  <a:close/>
-                  <a:moveTo>
-                    <a:pt x="937" y="0"/>
-                  </a:moveTo>
-                  <a:lnTo>
-                    <a:pt x="1873" y="0"/>
-                  </a:lnTo>
-                  <a:lnTo>
-                    <a:pt x="1873" y="521"/>
-                  </a:lnTo>
-                  <a:lnTo>
-                    <a:pt x="937" y="521"/>
-                  </a:lnTo>
-                  <a:lnTo>
-                    <a:pt x="937" y="0"/>
-                  </a:lnTo>
-                  <a:close/>
-                  <a:moveTo>
-                    <a:pt x="0" y="0"/>
-                  </a:moveTo>
-                  <a:lnTo>
-                    <a:pt x="440" y="0"/>
-                  </a:lnTo>
-                  <a:lnTo>
-                    <a:pt x="595" y="0"/>
-                  </a:lnTo>
-                  <a:lnTo>
-                    <a:pt x="595" y="521"/>
-                  </a:lnTo>
-                  <a:lnTo>
-                    <a:pt x="440" y="521"/>
-                  </a:lnTo>
-                  <a:lnTo>
-                    <a:pt x="440" y="1699"/>
-                  </a:lnTo>
-                  <a:lnTo>
-                    <a:pt x="1261" y="1699"/>
-                  </a:lnTo>
-                  <a:lnTo>
-                    <a:pt x="1261" y="2220"/>
-                  </a:lnTo>
-                  <a:lnTo>
-                    <a:pt x="440" y="2220"/>
-                  </a:lnTo>
-                  <a:lnTo>
-                    <a:pt x="0" y="2220"/>
-                  </a:lnTo>
-                  <a:lnTo>
-                    <a:pt x="0" y="1699"/>
-                  </a:lnTo>
-                  <a:lnTo>
-                    <a:pt x="0" y="521"/>
-                  </a:lnTo>
-                  <a:lnTo>
-                    <a:pt x="0" y="0"/>
-                  </a:lnTo>
-                  <a:close/>
-                </a:path>
-              </a:pathLst>
-            </a:custGeom>
+        </p:nvCxnSpPr>
+        <p:spPr>
+          <a:xfrm>
+            <a:off x="2125980" y="4198620"/>
+            <a:ext cx="274320" cy="0"/>
+          </a:xfrm>
+          <a:prstGeom prst="line">
+            <a:avLst/>
+          </a:prstGeom>
+          <a:ln w="38100">
             <a:solidFill>
-              <a:schemeClr val="accent2">
-                <a:lumMod val="40000"/>
-                <a:lumOff val="60000"/>
-              </a:schemeClr>
+              <a:schemeClr val="accent6"/>
             </a:solidFill>
-            <a:ln>
-              <a:solidFill>
-                <a:schemeClr val="tx1"/>
-              </a:solidFill>
-            </a:ln>
-          </p:spPr>
-          <p:style>
-            <a:lnRef idx="2">
-              <a:schemeClr val="accent1">
-                <a:lumMod val="75000"/>
-              </a:schemeClr>
-            </a:lnRef>
-            <a:fillRef idx="1">
-              <a:schemeClr val="accent1"/>
-            </a:fillRef>
-            <a:effectRef idx="0">
-              <a:srgbClr val="FFFFFF"/>
-            </a:effectRef>
-            <a:fontRef idx="minor">
-              <a:schemeClr val="lt1"/>
-            </a:fontRef>
-          </p:style>
-          <p:txBody>
-            <a:bodyPr vertOverflow="overflow" horzOverflow="overflow" vert="horz" wrap="square" numCol="1" spcCol="0" rtlCol="0" fromWordArt="0" anchor="ctr" anchorCtr="0" forceAA="0" compatLnSpc="1">
-              <a:noAutofit/>
-            </a:bodyPr>
-            <a:p>
-              <a:pPr lvl="0" algn="ctr">
-                <a:buClrTx/>
-                <a:buSzTx/>
-                <a:buFontTx/>
-              </a:pPr>
-              <a:endParaRPr lang="zh-CN" altLang="en-US">
-                <a:sym typeface="+mn-ea"/>
-              </a:endParaRPr>
-            </a:p>
-          </p:txBody>
-        </p:sp>
-        <p:sp>
-          <p:nvSpPr>
-            <p:cNvPr id="17" name="任意多边形 16"/>
-            <p:cNvSpPr/>
-            <p:nvPr/>
-          </p:nvSpPr>
-          <p:spPr>
-            <a:xfrm rot="10800000">
-              <a:off x="3664" y="2626"/>
-              <a:ext cx="2972" cy="5786"/>
-            </a:xfrm>
-            <a:custGeom>
-              <a:avLst/>
-              <a:gdLst/>
-              <a:ahLst/>
-              <a:cxnLst>
-                <a:cxn ang="3">
-                  <a:pos x="hc" y="t"/>
-                </a:cxn>
-                <a:cxn ang="cd2">
-                  <a:pos x="l" y="vc"/>
-                </a:cxn>
-                <a:cxn ang="cd4">
-                  <a:pos x="hc" y="b"/>
-                </a:cxn>
-                <a:cxn ang="0">
-                  <a:pos x="r" y="vc"/>
-                </a:cxn>
-              </a:cxnLst>
-              <a:rect l="l" t="t" r="r" b="b"/>
-              <a:pathLst>
-                <a:path w="1010" h="2666">
-                  <a:moveTo>
-                    <a:pt x="0" y="0"/>
-                  </a:moveTo>
-                  <a:lnTo>
-                    <a:pt x="343" y="0"/>
-                  </a:lnTo>
-                  <a:lnTo>
-                    <a:pt x="343" y="1167"/>
-                  </a:lnTo>
-                  <a:lnTo>
-                    <a:pt x="667" y="1167"/>
-                  </a:lnTo>
-                  <a:lnTo>
-                    <a:pt x="667" y="1166"/>
-                  </a:lnTo>
-                  <a:lnTo>
-                    <a:pt x="1010" y="1166"/>
-                  </a:lnTo>
-                  <a:lnTo>
-                    <a:pt x="1010" y="2666"/>
-                  </a:lnTo>
-                  <a:lnTo>
-                    <a:pt x="667" y="2666"/>
-                  </a:lnTo>
-                  <a:lnTo>
-                    <a:pt x="667" y="1510"/>
-                  </a:lnTo>
-                  <a:lnTo>
-                    <a:pt x="343" y="1510"/>
-                  </a:lnTo>
-                  <a:lnTo>
-                    <a:pt x="343" y="1511"/>
-                  </a:lnTo>
-                  <a:lnTo>
-                    <a:pt x="0" y="1511"/>
-                  </a:lnTo>
-                  <a:lnTo>
-                    <a:pt x="0" y="0"/>
-                  </a:lnTo>
-                  <a:close/>
-                </a:path>
-              </a:pathLst>
-            </a:custGeom>
+          </a:ln>
+        </p:spPr>
+        <p:style>
+          <a:lnRef idx="2">
+            <a:schemeClr val="accent1"/>
+          </a:lnRef>
+          <a:fillRef idx="0">
+            <a:srgbClr val="FFFFFF"/>
+          </a:fillRef>
+          <a:effectRef idx="0">
+            <a:srgbClr val="FFFFFF"/>
+          </a:effectRef>
+          <a:fontRef idx="minor">
+            <a:schemeClr val="tx1"/>
+          </a:fontRef>
+        </p:style>
+      </p:cxnSp>
+      <p:cxnSp>
+        <p:nvCxnSpPr>
+          <p:cNvPr id="14" name="直接连接符 13"/>
+          <p:cNvCxnSpPr/>
+          <p:nvPr/>
+        </p:nvCxnSpPr>
+        <p:spPr>
+          <a:xfrm>
+            <a:off x="2597150" y="4198620"/>
+            <a:ext cx="274320" cy="0"/>
+          </a:xfrm>
+          <a:prstGeom prst="line">
+            <a:avLst/>
+          </a:prstGeom>
+          <a:ln w="38100">
             <a:solidFill>
-              <a:schemeClr val="accent5">
-                <a:lumMod val="40000"/>
-                <a:lumOff val="60000"/>
-                <a:alpha val="70000"/>
-              </a:schemeClr>
+              <a:schemeClr val="accent6"/>
             </a:solidFill>
-            <a:ln>
-              <a:solidFill>
-                <a:schemeClr val="tx1"/>
-              </a:solidFill>
-            </a:ln>
-          </p:spPr>
-          <p:style>
-            <a:lnRef idx="2">
-              <a:schemeClr val="accent1">
-                <a:lumMod val="75000"/>
-              </a:schemeClr>
-            </a:lnRef>
-            <a:fillRef idx="1">
-              <a:schemeClr val="accent1"/>
-            </a:fillRef>
-            <a:effectRef idx="0">
-              <a:srgbClr val="FFFFFF"/>
-            </a:effectRef>
-            <a:fontRef idx="minor">
-              <a:schemeClr val="lt1"/>
-            </a:fontRef>
-          </p:style>
-          <p:txBody>
-            <a:bodyPr wrap="square" rtlCol="0" anchor="ctr">
-              <a:noAutofit/>
-            </a:bodyPr>
-            <a:p>
-              <a:pPr algn="ctr"/>
-              <a:endParaRPr lang="zh-CN" altLang="en-US"/>
-            </a:p>
-          </p:txBody>
-        </p:sp>
-        <p:sp>
-          <p:nvSpPr>
-            <p:cNvPr id="19" name="文本框 18"/>
-            <p:cNvSpPr txBox="1"/>
-            <p:nvPr/>
-          </p:nvSpPr>
-          <p:spPr>
-            <a:xfrm>
-              <a:off x="2034" y="5229"/>
-              <a:ext cx="1100" cy="599"/>
-            </a:xfrm>
-            <a:prstGeom prst="rect">
-              <a:avLst/>
-            </a:prstGeom>
-            <a:noFill/>
-          </p:spPr>
-          <p:txBody>
-            <a:bodyPr wrap="square" rtlCol="0">
-              <a:spAutoFit/>
-            </a:bodyPr>
-            <a:p>
-              <a:r>
-                <a:rPr lang="en-US" altLang="zh-CN" sz="1600">
-                  <a:solidFill>
-                    <a:srgbClr val="FF0000"/>
-                  </a:solidFill>
-                </a:rPr>
-                <a:t>AA1</a:t>
-              </a:r>
-              <a:endParaRPr lang="en-US" altLang="zh-CN" sz="1600">
-                <a:solidFill>
-                  <a:srgbClr val="FF0000"/>
-                </a:solidFill>
-              </a:endParaRPr>
-            </a:p>
-          </p:txBody>
-        </p:sp>
-        <p:sp>
-          <p:nvSpPr>
-            <p:cNvPr id="20" name="文本框 19"/>
-            <p:cNvSpPr txBox="1"/>
-            <p:nvPr/>
-          </p:nvSpPr>
-          <p:spPr>
-            <a:xfrm>
-              <a:off x="5354" y="3369"/>
-              <a:ext cx="1100" cy="599"/>
-            </a:xfrm>
-            <a:prstGeom prst="rect">
-              <a:avLst/>
-            </a:prstGeom>
-            <a:noFill/>
-          </p:spPr>
-          <p:txBody>
-            <a:bodyPr wrap="square" rtlCol="0">
-              <a:spAutoFit/>
-            </a:bodyPr>
-            <a:p>
-              <a:r>
-                <a:rPr lang="en-US" altLang="zh-CN" sz="1600">
-                  <a:solidFill>
-                    <a:srgbClr val="FF0000"/>
-                  </a:solidFill>
-                </a:rPr>
-                <a:t>AA2</a:t>
-              </a:r>
-              <a:endParaRPr lang="en-US" altLang="zh-CN" sz="1600">
-                <a:solidFill>
-                  <a:srgbClr val="FF0000"/>
-                </a:solidFill>
-              </a:endParaRPr>
-            </a:p>
-          </p:txBody>
-        </p:sp>
-        <p:sp>
-          <p:nvSpPr>
-            <p:cNvPr id="21" name="文本框 20"/>
-            <p:cNvSpPr txBox="1"/>
-            <p:nvPr/>
-          </p:nvSpPr>
-          <p:spPr>
-            <a:xfrm>
-              <a:off x="6526" y="7049"/>
-              <a:ext cx="1203" cy="519"/>
-            </a:xfrm>
-            <a:prstGeom prst="rect">
-              <a:avLst/>
-            </a:prstGeom>
-            <a:noFill/>
-          </p:spPr>
-          <p:txBody>
-            <a:bodyPr wrap="square" rtlCol="0">
-              <a:noAutofit/>
-            </a:bodyPr>
-            <a:p>
-              <a:r>
-                <a:rPr lang="en-US" altLang="zh-CN" sz="1600">
-                  <a:solidFill>
-                    <a:srgbClr val="FF0000"/>
-                  </a:solidFill>
-                </a:rPr>
-                <a:t>AA3</a:t>
-              </a:r>
-              <a:endParaRPr lang="en-US" altLang="zh-CN" sz="1600">
-                <a:solidFill>
-                  <a:srgbClr val="FF0000"/>
-                </a:solidFill>
-              </a:endParaRPr>
-            </a:p>
-          </p:txBody>
-        </p:sp>
-        <p:sp>
-          <p:nvSpPr>
-            <p:cNvPr id="27" name="文本框 26"/>
-            <p:cNvSpPr txBox="1"/>
-            <p:nvPr/>
-          </p:nvSpPr>
-          <p:spPr>
-            <a:xfrm>
-              <a:off x="4414" y="5229"/>
-              <a:ext cx="1298" cy="519"/>
-            </a:xfrm>
-            <a:prstGeom prst="rect">
-              <a:avLst/>
-            </a:prstGeom>
-            <a:noFill/>
-          </p:spPr>
-          <p:txBody>
-            <a:bodyPr wrap="square" rtlCol="0">
-              <a:noAutofit/>
-            </a:bodyPr>
-            <a:p>
-              <a:r>
-                <a:rPr lang="en-US" altLang="zh-CN" sz="1600">
-                  <a:solidFill>
-                    <a:srgbClr val="FF0000"/>
-                  </a:solidFill>
-                </a:rPr>
-                <a:t>PO1</a:t>
-              </a:r>
-              <a:endParaRPr lang="en-US" altLang="zh-CN" sz="1600">
-                <a:solidFill>
-                  <a:srgbClr val="FF0000"/>
-                </a:solidFill>
-              </a:endParaRPr>
-            </a:p>
-          </p:txBody>
-        </p:sp>
-      </p:grpSp>
+          </a:ln>
+        </p:spPr>
+        <p:style>
+          <a:lnRef idx="2">
+            <a:schemeClr val="accent1"/>
+          </a:lnRef>
+          <a:fillRef idx="0">
+            <a:srgbClr val="FFFFFF"/>
+          </a:fillRef>
+          <a:effectRef idx="0">
+            <a:srgbClr val="FFFFFF"/>
+          </a:effectRef>
+          <a:fontRef idx="minor">
+            <a:schemeClr val="tx1"/>
+          </a:fontRef>
+        </p:style>
+      </p:cxnSp>
+      <p:cxnSp>
+        <p:nvCxnSpPr>
+          <p:cNvPr id="15" name="直接连接符 14"/>
+          <p:cNvCxnSpPr/>
+          <p:nvPr/>
+        </p:nvCxnSpPr>
+        <p:spPr>
+          <a:xfrm>
+            <a:off x="2962275" y="4198620"/>
+            <a:ext cx="274320" cy="0"/>
+          </a:xfrm>
+          <a:prstGeom prst="line">
+            <a:avLst/>
+          </a:prstGeom>
+          <a:ln w="38100">
+            <a:solidFill>
+              <a:schemeClr val="accent6"/>
+            </a:solidFill>
+          </a:ln>
+        </p:spPr>
+        <p:style>
+          <a:lnRef idx="2">
+            <a:schemeClr val="accent1"/>
+          </a:lnRef>
+          <a:fillRef idx="0">
+            <a:srgbClr val="FFFFFF"/>
+          </a:fillRef>
+          <a:effectRef idx="0">
+            <a:srgbClr val="FFFFFF"/>
+          </a:effectRef>
+          <a:fontRef idx="minor">
+            <a:schemeClr val="tx1"/>
+          </a:fontRef>
+        </p:style>
+      </p:cxnSp>
+      <p:cxnSp>
+        <p:nvCxnSpPr>
+          <p:cNvPr id="16" name="直接连接符 15"/>
+          <p:cNvCxnSpPr/>
+          <p:nvPr/>
+        </p:nvCxnSpPr>
+        <p:spPr>
+          <a:xfrm>
+            <a:off x="3321050" y="4198620"/>
+            <a:ext cx="274320" cy="0"/>
+          </a:xfrm>
+          <a:prstGeom prst="line">
+            <a:avLst/>
+          </a:prstGeom>
+          <a:ln w="38100">
+            <a:solidFill>
+              <a:schemeClr val="accent6"/>
+            </a:solidFill>
+          </a:ln>
+        </p:spPr>
+        <p:style>
+          <a:lnRef idx="2">
+            <a:schemeClr val="accent1"/>
+          </a:lnRef>
+          <a:fillRef idx="0">
+            <a:srgbClr val="FFFFFF"/>
+          </a:fillRef>
+          <a:effectRef idx="0">
+            <a:srgbClr val="FFFFFF"/>
+          </a:effectRef>
+          <a:fontRef idx="minor">
+            <a:schemeClr val="tx1"/>
+          </a:fontRef>
+        </p:style>
+      </p:cxnSp>
+      <p:cxnSp>
+        <p:nvCxnSpPr>
+          <p:cNvPr id="18" name="直接连接符 17"/>
+          <p:cNvCxnSpPr/>
+          <p:nvPr/>
+        </p:nvCxnSpPr>
+        <p:spPr>
+          <a:xfrm>
+            <a:off x="3831590" y="4198620"/>
+            <a:ext cx="367665" cy="0"/>
+          </a:xfrm>
+          <a:prstGeom prst="line">
+            <a:avLst/>
+          </a:prstGeom>
+          <a:ln w="38100">
+            <a:solidFill>
+              <a:srgbClr val="00B0F0"/>
+            </a:solidFill>
+          </a:ln>
+        </p:spPr>
+        <p:style>
+          <a:lnRef idx="2">
+            <a:schemeClr val="accent1"/>
+          </a:lnRef>
+          <a:fillRef idx="0">
+            <a:srgbClr val="FFFFFF"/>
+          </a:fillRef>
+          <a:effectRef idx="0">
+            <a:srgbClr val="FFFFFF"/>
+          </a:effectRef>
+          <a:fontRef idx="minor">
+            <a:schemeClr val="tx1"/>
+          </a:fontRef>
+        </p:style>
+      </p:cxnSp>
+      <p:cxnSp>
+        <p:nvCxnSpPr>
+          <p:cNvPr id="22" name="直接连接符 21"/>
+          <p:cNvCxnSpPr/>
+          <p:nvPr/>
+        </p:nvCxnSpPr>
+        <p:spPr>
+          <a:xfrm>
+            <a:off x="4326255" y="4198620"/>
+            <a:ext cx="220980" cy="0"/>
+          </a:xfrm>
+          <a:prstGeom prst="line">
+            <a:avLst/>
+          </a:prstGeom>
+          <a:ln w="38100">
+            <a:solidFill>
+              <a:srgbClr val="00B0F0"/>
+            </a:solidFill>
+          </a:ln>
+        </p:spPr>
+        <p:style>
+          <a:lnRef idx="2">
+            <a:schemeClr val="accent1"/>
+          </a:lnRef>
+          <a:fillRef idx="0">
+            <a:srgbClr val="FFFFFF"/>
+          </a:fillRef>
+          <a:effectRef idx="0">
+            <a:srgbClr val="FFFFFF"/>
+          </a:effectRef>
+          <a:fontRef idx="minor">
+            <a:schemeClr val="tx1"/>
+          </a:fontRef>
+        </p:style>
+      </p:cxnSp>
+      <p:cxnSp>
+        <p:nvCxnSpPr>
+          <p:cNvPr id="23" name="直接连接符 22"/>
+          <p:cNvCxnSpPr/>
+          <p:nvPr/>
+        </p:nvCxnSpPr>
+        <p:spPr>
+          <a:xfrm>
+            <a:off x="4674235" y="4198620"/>
+            <a:ext cx="220980" cy="0"/>
+          </a:xfrm>
+          <a:prstGeom prst="line">
+            <a:avLst/>
+          </a:prstGeom>
+          <a:ln w="38100">
+            <a:solidFill>
+              <a:srgbClr val="00B0F0"/>
+            </a:solidFill>
+          </a:ln>
+        </p:spPr>
+        <p:style>
+          <a:lnRef idx="2">
+            <a:schemeClr val="accent1"/>
+          </a:lnRef>
+          <a:fillRef idx="0">
+            <a:srgbClr val="FFFFFF"/>
+          </a:fillRef>
+          <a:effectRef idx="0">
+            <a:srgbClr val="FFFFFF"/>
+          </a:effectRef>
+          <a:fontRef idx="minor">
+            <a:schemeClr val="tx1"/>
+          </a:fontRef>
+        </p:style>
+      </p:cxnSp>
+      <p:cxnSp>
+        <p:nvCxnSpPr>
+          <p:cNvPr id="24" name="直接连接符 23"/>
+          <p:cNvCxnSpPr/>
+          <p:nvPr/>
+        </p:nvCxnSpPr>
+        <p:spPr>
+          <a:xfrm>
+            <a:off x="5033645" y="4198620"/>
+            <a:ext cx="335280" cy="0"/>
+          </a:xfrm>
+          <a:prstGeom prst="line">
+            <a:avLst/>
+          </a:prstGeom>
+          <a:ln w="38100">
+            <a:solidFill>
+              <a:srgbClr val="00B0F0"/>
+            </a:solidFill>
+          </a:ln>
+        </p:spPr>
+        <p:style>
+          <a:lnRef idx="2">
+            <a:schemeClr val="accent1"/>
+          </a:lnRef>
+          <a:fillRef idx="0">
+            <a:srgbClr val="FFFFFF"/>
+          </a:fillRef>
+          <a:effectRef idx="0">
+            <a:srgbClr val="FFFFFF"/>
+          </a:effectRef>
+          <a:fontRef idx="minor">
+            <a:schemeClr val="tx1"/>
+          </a:fontRef>
+        </p:style>
+      </p:cxnSp>
     </p:spTree>
     <p:custDataLst>
-      <p:tags r:id="rId1"/>
+      <p:tags r:id="rId3"/>
     </p:custDataLst>
   </p:cSld>
   <p:clrMapOvr>
